--- a/files/teaching-resources/concordiacollege-busn-301/busn-301-lecture-note/busn301-ch22.pptx
+++ b/files/teaching-resources/concordiacollege-busn-301/busn-301-lecture-note/busn301-ch22.pptx
@@ -237,7 +237,7 @@
           <a:p>
             <a:fld id="{2D359EC7-19C7-4638-A61A-0E2B59861576}" type="datetimeFigureOut">
               <a:rPr lang="en-US" smtClean="0"/>
-              <a:t>3/20/2026</a:t>
+              <a:t>3/29/2026</a:t>
             </a:fld>
             <a:endParaRPr lang="en-US"/>
           </a:p>
@@ -1175,7 +1175,7 @@
           <a:p>
             <a:fld id="{7968114D-31B9-4B78-9ACC-70FB90027BFD}" type="datetime1">
               <a:rPr lang="en-US" smtClean="0"/>
-              <a:t>3/20/2026</a:t>
+              <a:t>3/29/2026</a:t>
             </a:fld>
             <a:endParaRPr lang="en-US"/>
           </a:p>
@@ -1346,7 +1346,7 @@
           <a:p>
             <a:fld id="{873F4A91-75B0-4800-B4E2-20956DB94300}" type="datetime1">
               <a:rPr lang="en-US" smtClean="0"/>
-              <a:t>3/20/2026</a:t>
+              <a:t>3/29/2026</a:t>
             </a:fld>
             <a:endParaRPr lang="en-US"/>
           </a:p>
@@ -1527,7 +1527,7 @@
           <a:p>
             <a:fld id="{0F651350-1A97-42BE-B68B-7AD85E4EDCBF}" type="datetime1">
               <a:rPr lang="en-US" smtClean="0"/>
-              <a:t>3/20/2026</a:t>
+              <a:t>3/29/2026</a:t>
             </a:fld>
             <a:endParaRPr lang="en-US"/>
           </a:p>
@@ -1698,7 +1698,7 @@
           <a:p>
             <a:fld id="{CE41F65B-C187-4F2E-97E4-866F44D3FEC5}" type="datetime1">
               <a:rPr lang="en-US" smtClean="0"/>
-              <a:t>3/20/2026</a:t>
+              <a:t>3/29/2026</a:t>
             </a:fld>
             <a:endParaRPr lang="en-US"/>
           </a:p>
@@ -1946,7 +1946,7 @@
           <a:p>
             <a:fld id="{5B30CE8C-B3D2-4FED-8171-A22B1E84AA49}" type="datetime1">
               <a:rPr lang="en-US" smtClean="0"/>
-              <a:t>3/20/2026</a:t>
+              <a:t>3/29/2026</a:t>
             </a:fld>
             <a:endParaRPr lang="en-US"/>
           </a:p>
@@ -2234,7 +2234,7 @@
           <a:p>
             <a:fld id="{18787D79-C197-49E5-840E-62EF773E40EB}" type="datetime1">
               <a:rPr lang="en-US" smtClean="0"/>
-              <a:t>3/20/2026</a:t>
+              <a:t>3/29/2026</a:t>
             </a:fld>
             <a:endParaRPr lang="en-US"/>
           </a:p>
@@ -2656,7 +2656,7 @@
           <a:p>
             <a:fld id="{6AB4C717-ACD6-42B4-B4D2-A00897526083}" type="datetime1">
               <a:rPr lang="en-US" smtClean="0"/>
-              <a:t>3/20/2026</a:t>
+              <a:t>3/29/2026</a:t>
             </a:fld>
             <a:endParaRPr lang="en-US"/>
           </a:p>
@@ -2776,7 +2776,7 @@
           <a:p>
             <a:fld id="{35F0F010-C38E-44B3-A11D-B9CE0300A741}" type="datetime1">
               <a:rPr lang="en-US" smtClean="0"/>
-              <a:t>3/20/2026</a:t>
+              <a:t>3/29/2026</a:t>
             </a:fld>
             <a:endParaRPr lang="en-US"/>
           </a:p>
@@ -2874,7 +2874,7 @@
           <a:p>
             <a:fld id="{0E2442EE-45D9-4220-A88F-EE689B9875C3}" type="datetime1">
               <a:rPr lang="en-US" smtClean="0"/>
-              <a:t>3/20/2026</a:t>
+              <a:t>3/29/2026</a:t>
             </a:fld>
             <a:endParaRPr lang="en-US"/>
           </a:p>
@@ -3152,7 +3152,7 @@
           <a:p>
             <a:fld id="{D5FA1C2B-1683-45DB-88D6-369C6CB6AB24}" type="datetime1">
               <a:rPr lang="en-US" smtClean="0"/>
-              <a:t>3/20/2026</a:t>
+              <a:t>3/29/2026</a:t>
             </a:fld>
             <a:endParaRPr lang="en-US"/>
           </a:p>
@@ -3407,7 +3407,7 @@
           <a:p>
             <a:fld id="{DFFB611B-DC9D-42DB-B865-14DB93E316AF}" type="datetime1">
               <a:rPr lang="en-US" smtClean="0"/>
-              <a:t>3/20/2026</a:t>
+              <a:t>3/29/2026</a:t>
             </a:fld>
             <a:endParaRPr lang="en-US"/>
           </a:p>
@@ -3621,7 +3621,7 @@
           <a:p>
             <a:fld id="{A3B8D4B9-4EE2-4C3D-B367-BE7622E78789}" type="datetime1">
               <a:rPr lang="en-US" smtClean="0"/>
-              <a:t>3/20/2026</a:t>
+              <a:t>3/29/2026</a:t>
             </a:fld>
             <a:endParaRPr lang="en-US"/>
           </a:p>
@@ -10816,8 +10816,8 @@
           <a:chExt cx="0" cy="0"/>
         </a:xfrm>
       </p:grpSpPr>
-      <mc:AlternateContent xmlns:mc="http://schemas.openxmlformats.org/markup-compatibility/2006" xmlns:a14="http://schemas.microsoft.com/office/drawing/2010/main">
-        <mc:Choice Requires="a14">
+      <mc:AlternateContent xmlns:mc="http://schemas.openxmlformats.org/markup-compatibility/2006">
+        <mc:Choice xmlns:a14="http://schemas.microsoft.com/office/drawing/2010/main" Requires="a14">
           <p:sp>
             <p:nvSpPr>
               <p:cNvPr id="3" name="Content Placeholder 2">
@@ -11009,10 +11009,10 @@
                                 <m:t> </m:t>
                               </m:r>
                               <m:r>
-                                <a:rPr lang="en-US" altLang="zh-TW" sz="2400" i="1">
+                                <a:rPr lang="en-US" altLang="zh-TW" sz="2400" b="0" i="1" smtClean="0">
                                   <a:latin typeface="Cambria Math" panose="02040503050406030204" pitchFamily="18" charset="0"/>
                                 </a:rPr>
-                                <m:t>𝜔</m:t>
+                                <m:t>𝑤</m:t>
                               </m:r>
                             </m:e>
                             <m:sub>
@@ -11065,10 +11065,10 @@
                             </m:sSubPr>
                             <m:e>
                               <m:r>
-                                <a:rPr lang="en-US" altLang="zh-TW" sz="2400" i="1">
+                                <a:rPr lang="en-US" altLang="zh-TW" sz="2400" b="0" i="1" smtClean="0">
                                   <a:latin typeface="Cambria Math" panose="02040503050406030204" pitchFamily="18" charset="0"/>
                                 </a:rPr>
-                                <m:t>𝜔</m:t>
+                                <m:t>𝑤</m:t>
                               </m:r>
                             </m:e>
                             <m:sub>
@@ -11382,7 +11382,7 @@
                                 <a:rPr lang="en-US" altLang="zh-TW" sz="2400" b="0" i="1" smtClean="0">
                                   <a:latin typeface="Cambria Math" panose="02040503050406030204" pitchFamily="18" charset="0"/>
                                 </a:rPr>
-                                <m:t>𝜔</m:t>
+                                <m:t>𝑤</m:t>
                               </m:r>
                             </m:e>
                             <m:sub>
@@ -11409,7 +11409,7 @@
                                 <a:rPr lang="en-US" altLang="zh-TW" sz="2400" b="0" i="1" smtClean="0">
                                   <a:latin typeface="Cambria Math" panose="02040503050406030204" pitchFamily="18" charset="0"/>
                                 </a:rPr>
-                                <m:t>𝜔</m:t>
+                                <m:t>𝑤</m:t>
                               </m:r>
                             </m:e>
                             <m:sub>
@@ -11544,10 +11544,10 @@
                             </m:sSubPr>
                             <m:e>
                               <m:r>
-                                <a:rPr lang="en-US" altLang="zh-TW" sz="2400" i="1">
+                                <a:rPr lang="en-US" altLang="zh-TW" sz="2400" b="0" i="1" smtClean="0">
                                   <a:latin typeface="Cambria Math" panose="02040503050406030204" pitchFamily="18" charset="0"/>
                                 </a:rPr>
-                                <m:t>𝜔</m:t>
+                                <m:t>𝑤</m:t>
                               </m:r>
                             </m:e>
                             <m:sub>
@@ -11571,10 +11571,10 @@
                             </m:sSubPr>
                             <m:e>
                               <m:r>
-                                <a:rPr lang="en-US" altLang="zh-TW" sz="2400" i="1">
+                                <a:rPr lang="en-US" altLang="zh-TW" sz="2400" b="0" i="1" smtClean="0">
                                   <a:latin typeface="Cambria Math" panose="02040503050406030204" pitchFamily="18" charset="0"/>
                                 </a:rPr>
-                                <m:t>𝜔</m:t>
+                                <m:t>𝑤</m:t>
                               </m:r>
                             </m:e>
                             <m:sub>
@@ -11665,10 +11665,10 @@
                             </m:sSubPr>
                             <m:e>
                               <m:r>
-                                <a:rPr lang="en-US" altLang="zh-TW" sz="2400" i="1">
+                                <a:rPr lang="en-US" altLang="zh-TW" sz="2400" b="0" i="1" smtClean="0">
                                   <a:latin typeface="Cambria Math" panose="02040503050406030204" pitchFamily="18" charset="0"/>
                                 </a:rPr>
-                                <m:t>𝜔</m:t>
+                                <m:t>𝑤</m:t>
                               </m:r>
                             </m:e>
                             <m:sub>
@@ -11746,10 +11746,10 @@
                             </m:sSubPr>
                             <m:e>
                               <m:r>
-                                <a:rPr lang="en-US" altLang="zh-TW" sz="2400" i="1">
+                                <a:rPr lang="en-US" altLang="zh-TW" sz="2400" b="0" i="1" smtClean="0">
                                   <a:latin typeface="Cambria Math" panose="02040503050406030204" pitchFamily="18" charset="0"/>
                                 </a:rPr>
-                                <m:t>𝜔</m:t>
+                                <m:t>𝑤</m:t>
                               </m:r>
                             </m:e>
                             <m:sub>
@@ -11822,7 +11822,7 @@
             </p:txBody>
           </p:sp>
         </mc:Choice>
-        <mc:Fallback xmlns="">
+        <mc:Fallback>
           <p:sp>
             <p:nvSpPr>
               <p:cNvPr id="3" name="Content Placeholder 2">
@@ -13799,8 +13799,8 @@
           <a:chExt cx="0" cy="0"/>
         </a:xfrm>
       </p:grpSpPr>
-      <mc:AlternateContent xmlns:mc="http://schemas.openxmlformats.org/markup-compatibility/2006">
-        <mc:Choice xmlns:a14="http://schemas.microsoft.com/office/drawing/2010/main" Requires="a14">
+      <mc:AlternateContent xmlns:mc="http://schemas.openxmlformats.org/markup-compatibility/2006" xmlns:a14="http://schemas.microsoft.com/office/drawing/2010/main">
+        <mc:Choice Requires="a14">
           <p:sp>
             <p:nvSpPr>
               <p:cNvPr id="3" name="Content Placeholder 2">
@@ -14397,7 +14397,7 @@
             </p:txBody>
           </p:sp>
         </mc:Choice>
-        <mc:Fallback>
+        <mc:Fallback xmlns="">
           <p:sp>
             <p:nvSpPr>
               <p:cNvPr id="3" name="Content Placeholder 2">
@@ -15101,8 +15101,8 @@
           <a:chExt cx="0" cy="0"/>
         </a:xfrm>
       </p:grpSpPr>
-      <mc:AlternateContent xmlns:mc="http://schemas.openxmlformats.org/markup-compatibility/2006">
-        <mc:Choice xmlns:a14="http://schemas.microsoft.com/office/drawing/2010/main" Requires="a14">
+      <mc:AlternateContent xmlns:mc="http://schemas.openxmlformats.org/markup-compatibility/2006" xmlns:a14="http://schemas.microsoft.com/office/drawing/2010/main">
+        <mc:Choice Requires="a14">
           <p:sp>
             <p:nvSpPr>
               <p:cNvPr id="3" name="Content Placeholder 2">
@@ -15773,7 +15773,7 @@
             </p:txBody>
           </p:sp>
         </mc:Choice>
-        <mc:Fallback>
+        <mc:Fallback xmlns="">
           <p:sp>
             <p:nvSpPr>
               <p:cNvPr id="3" name="Content Placeholder 2">
@@ -16520,8 +16520,8 @@
           <a:chExt cx="0" cy="0"/>
         </a:xfrm>
       </p:grpSpPr>
-      <mc:AlternateContent xmlns:mc="http://schemas.openxmlformats.org/markup-compatibility/2006">
-        <mc:Choice xmlns:a14="http://schemas.microsoft.com/office/drawing/2010/main" Requires="a14">
+      <mc:AlternateContent xmlns:mc="http://schemas.openxmlformats.org/markup-compatibility/2006" xmlns:a14="http://schemas.microsoft.com/office/drawing/2010/main">
+        <mc:Choice Requires="a14">
           <p:sp>
             <p:nvSpPr>
               <p:cNvPr id="3" name="Content Placeholder 2">
@@ -17121,7 +17121,7 @@
             </p:txBody>
           </p:sp>
         </mc:Choice>
-        <mc:Fallback>
+        <mc:Fallback xmlns="">
           <p:sp>
             <p:nvSpPr>
               <p:cNvPr id="3" name="Content Placeholder 2">
@@ -18687,8 +18687,8 @@
           <a:chExt cx="0" cy="0"/>
         </a:xfrm>
       </p:grpSpPr>
-      <mc:AlternateContent xmlns:mc="http://schemas.openxmlformats.org/markup-compatibility/2006">
-        <mc:Choice xmlns:a14="http://schemas.microsoft.com/office/drawing/2010/main" Requires="a14">
+      <mc:AlternateContent xmlns:mc="http://schemas.openxmlformats.org/markup-compatibility/2006" xmlns:a14="http://schemas.microsoft.com/office/drawing/2010/main">
+        <mc:Choice Requires="a14">
           <p:sp>
             <p:nvSpPr>
               <p:cNvPr id="3" name="Content Placeholder 2">
@@ -18958,7 +18958,7 @@
             </p:txBody>
           </p:sp>
         </mc:Choice>
-        <mc:Fallback>
+        <mc:Fallback xmlns="">
           <p:sp>
             <p:nvSpPr>
               <p:cNvPr id="3" name="Content Placeholder 2">
@@ -19741,8 +19741,8 @@
           <a:chExt cx="0" cy="0"/>
         </a:xfrm>
       </p:grpSpPr>
-      <mc:AlternateContent xmlns:mc="http://schemas.openxmlformats.org/markup-compatibility/2006">
-        <mc:Choice xmlns:a14="http://schemas.microsoft.com/office/drawing/2010/main" Requires="a14">
+      <mc:AlternateContent xmlns:mc="http://schemas.openxmlformats.org/markup-compatibility/2006" xmlns:a14="http://schemas.microsoft.com/office/drawing/2010/main">
+        <mc:Choice Requires="a14">
           <p:sp>
             <p:nvSpPr>
               <p:cNvPr id="3" name="Content Placeholder 2">
@@ -20082,7 +20082,7 @@
             </p:txBody>
           </p:sp>
         </mc:Choice>
-        <mc:Fallback>
+        <mc:Fallback xmlns="">
           <p:sp>
             <p:nvSpPr>
               <p:cNvPr id="3" name="Content Placeholder 2">
@@ -20786,8 +20786,8 @@
           <a:chExt cx="0" cy="0"/>
         </a:xfrm>
       </p:grpSpPr>
-      <mc:AlternateContent xmlns:mc="http://schemas.openxmlformats.org/markup-compatibility/2006">
-        <mc:Choice xmlns:a14="http://schemas.microsoft.com/office/drawing/2010/main" Requires="a14">
+      <mc:AlternateContent xmlns:mc="http://schemas.openxmlformats.org/markup-compatibility/2006" xmlns:a14="http://schemas.microsoft.com/office/drawing/2010/main">
+        <mc:Choice Requires="a14">
           <p:sp>
             <p:nvSpPr>
               <p:cNvPr id="3" name="Content Placeholder 2">
@@ -21101,13 +21101,7 @@
                                     <a:rPr lang="en-US" altLang="zh-TW" sz="2400" i="1">
                                       <a:latin typeface="Cambria Math" panose="02040503050406030204" pitchFamily="18" charset="0"/>
                                     </a:rPr>
-                                    <m:t>𝑑</m:t>
-                                  </m:r>
-                                  <m:r>
-                                    <a:rPr lang="en-US" altLang="zh-TW" sz="2400" i="1">
-                                      <a:latin typeface="Cambria Math" panose="02040503050406030204" pitchFamily="18" charset="0"/>
-                                    </a:rPr>
-                                    <m:t>𝑐</m:t>
+                                    <m:t>𝑑𝑐</m:t>
                                   </m:r>
                                   <m:d>
                                     <m:dPr>
@@ -21826,7 +21820,7 @@
             </p:txBody>
           </p:sp>
         </mc:Choice>
-        <mc:Fallback>
+        <mc:Fallback xmlns="">
           <p:sp>
             <p:nvSpPr>
               <p:cNvPr id="3" name="Content Placeholder 2">
@@ -22617,8 +22611,8 @@
           <a:chExt cx="0" cy="0"/>
         </a:xfrm>
       </p:grpSpPr>
-      <mc:AlternateContent xmlns:mc="http://schemas.openxmlformats.org/markup-compatibility/2006">
-        <mc:Choice xmlns:a14="http://schemas.microsoft.com/office/drawing/2010/main" Requires="a14">
+      <mc:AlternateContent xmlns:mc="http://schemas.openxmlformats.org/markup-compatibility/2006" xmlns:a14="http://schemas.microsoft.com/office/drawing/2010/main">
+        <mc:Choice Requires="a14">
           <p:sp>
             <p:nvSpPr>
               <p:cNvPr id="3" name="Content Placeholder 2">
@@ -23233,7 +23227,7 @@
             </p:txBody>
           </p:sp>
         </mc:Choice>
-        <mc:Fallback>
+        <mc:Fallback xmlns="">
           <p:sp>
             <p:nvSpPr>
               <p:cNvPr id="3" name="Content Placeholder 2">
@@ -24045,8 +24039,8 @@
           <a:chExt cx="0" cy="0"/>
         </a:xfrm>
       </p:grpSpPr>
-      <mc:AlternateContent xmlns:mc="http://schemas.openxmlformats.org/markup-compatibility/2006" xmlns:a14="http://schemas.microsoft.com/office/drawing/2010/main">
-        <mc:Choice Requires="a14">
+      <mc:AlternateContent xmlns:mc="http://schemas.openxmlformats.org/markup-compatibility/2006">
+        <mc:Choice xmlns:a14="http://schemas.microsoft.com/office/drawing/2010/main" Requires="a14">
           <p:sp>
             <p:nvSpPr>
               <p:cNvPr id="3" name="Content Placeholder 2">
@@ -24177,10 +24171,10 @@
                             </m:sSubPr>
                             <m:e>
                               <m:r>
-                                <a:rPr lang="en-US" altLang="zh-TW" sz="2400" i="1">
+                                <a:rPr lang="en-US" altLang="zh-TW" sz="2400" b="0" i="1" smtClean="0">
                                   <a:latin typeface="Cambria Math" panose="02040503050406030204" pitchFamily="18" charset="0"/>
                                 </a:rPr>
-                                <m:t>𝜔</m:t>
+                                <m:t>𝑤</m:t>
                               </m:r>
                             </m:e>
                             <m:sub>
@@ -24208,10 +24202,10 @@
                             </m:sSubPr>
                             <m:e>
                               <m:r>
-                                <a:rPr lang="en-US" altLang="zh-TW" sz="2400" i="1">
+                                <a:rPr lang="en-US" altLang="zh-TW" sz="2400" b="0" i="1" smtClean="0">
                                   <a:latin typeface="Cambria Math" panose="02040503050406030204" pitchFamily="18" charset="0"/>
                                 </a:rPr>
-                                <m:t>𝜔</m:t>
+                                <m:t>𝑤</m:t>
                               </m:r>
                             </m:e>
                             <m:sub>
@@ -24299,10 +24293,10 @@
                             </m:sSubPr>
                             <m:e>
                               <m:r>
-                                <a:rPr lang="en-US" altLang="zh-TW" sz="2400" i="1">
+                                <a:rPr lang="en-US" altLang="zh-TW" sz="2400" b="0" i="1" smtClean="0">
                                   <a:latin typeface="Cambria Math" panose="02040503050406030204" pitchFamily="18" charset="0"/>
                                 </a:rPr>
-                                <m:t>𝜔</m:t>
+                                <m:t>𝑤</m:t>
                               </m:r>
                             </m:e>
                             <m:sub>
@@ -24330,10 +24324,10 @@
                             </m:sSubPr>
                             <m:e>
                               <m:r>
-                                <a:rPr lang="en-US" altLang="zh-TW" sz="2400" i="1">
+                                <a:rPr lang="en-US" altLang="zh-TW" sz="2400" b="0" i="1" smtClean="0">
                                   <a:latin typeface="Cambria Math" panose="02040503050406030204" pitchFamily="18" charset="0"/>
                                 </a:rPr>
-                                <m:t>𝜔</m:t>
+                                <m:t>𝑤</m:t>
                               </m:r>
                             </m:e>
                             <m:sub>
@@ -24523,10 +24517,10 @@
                             </m:sSubPr>
                             <m:e>
                               <m:r>
-                                <a:rPr lang="en-US" altLang="zh-TW" sz="2400" i="1">
+                                <a:rPr lang="en-US" altLang="zh-TW" sz="2400" b="0" i="1" smtClean="0">
                                   <a:latin typeface="Cambria Math" panose="02040503050406030204" pitchFamily="18" charset="0"/>
                                 </a:rPr>
-                                <m:t>𝜔</m:t>
+                                <m:t>𝑤</m:t>
                               </m:r>
                             </m:e>
                             <m:sub>
@@ -24554,10 +24548,10 @@
                             </m:sSubPr>
                             <m:e>
                               <m:r>
-                                <a:rPr lang="en-US" altLang="zh-TW" sz="2400" i="1">
+                                <a:rPr lang="en-US" altLang="zh-TW" sz="2400" b="0" i="1" smtClean="0">
                                   <a:latin typeface="Cambria Math" panose="02040503050406030204" pitchFamily="18" charset="0"/>
                                 </a:rPr>
-                                <m:t>𝜔</m:t>
+                                <m:t>𝑤</m:t>
                               </m:r>
                             </m:e>
                             <m:sub>
@@ -24611,10 +24605,10 @@
                         </m:sSubPr>
                         <m:e>
                           <m:r>
-                            <a:rPr lang="en-US" altLang="zh-TW" sz="2400" i="1">
+                            <a:rPr lang="en-US" altLang="zh-TW" sz="2400" b="0" i="1" smtClean="0">
                               <a:latin typeface="Cambria Math" panose="02040503050406030204" pitchFamily="18" charset="0"/>
                             </a:rPr>
-                            <m:t>𝜔</m:t>
+                            <m:t>𝑤</m:t>
                           </m:r>
                         </m:e>
                         <m:sub>
@@ -24676,10 +24670,10 @@
                             </m:sSubPr>
                             <m:e>
                               <m:r>
-                                <a:rPr lang="en-US" altLang="zh-TW" sz="2400" i="1">
+                                <a:rPr lang="en-US" altLang="zh-TW" sz="2400" b="0" i="1" smtClean="0">
                                   <a:latin typeface="Cambria Math" panose="02040503050406030204" pitchFamily="18" charset="0"/>
                                 </a:rPr>
-                                <m:t>𝜔</m:t>
+                                <m:t>𝑤</m:t>
                               </m:r>
                             </m:e>
                             <m:sub>
@@ -24707,10 +24701,10 @@
                             </m:sSubPr>
                             <m:e>
                               <m:r>
-                                <a:rPr lang="en-US" altLang="zh-TW" sz="2400" i="1">
+                                <a:rPr lang="en-US" altLang="zh-TW" sz="2400" b="0" i="1" smtClean="0">
                                   <a:latin typeface="Cambria Math" panose="02040503050406030204" pitchFamily="18" charset="0"/>
                                 </a:rPr>
-                                <m:t>𝜔</m:t>
+                                <m:t>𝑤</m:t>
                               </m:r>
                             </m:e>
                             <m:sub>
@@ -24764,10 +24758,10 @@
                         </m:sSubPr>
                         <m:e>
                           <m:r>
-                            <a:rPr lang="en-US" altLang="zh-TW" sz="2400" i="1">
+                            <a:rPr lang="en-US" altLang="zh-TW" sz="2400" b="0" i="1" smtClean="0">
                               <a:latin typeface="Cambria Math" panose="02040503050406030204" pitchFamily="18" charset="0"/>
                             </a:rPr>
-                            <m:t>𝜔</m:t>
+                            <m:t>𝑤</m:t>
                           </m:r>
                         </m:e>
                         <m:sub>
@@ -24829,10 +24823,10 @@
                             </m:sSubPr>
                             <m:e>
                               <m:r>
-                                <a:rPr lang="en-US" altLang="zh-TW" sz="2400" i="1">
+                                <a:rPr lang="en-US" altLang="zh-TW" sz="2400" b="0" i="1" smtClean="0">
                                   <a:latin typeface="Cambria Math" panose="02040503050406030204" pitchFamily="18" charset="0"/>
                                 </a:rPr>
-                                <m:t>𝜔</m:t>
+                                <m:t>𝑤</m:t>
                               </m:r>
                             </m:e>
                             <m:sub>
@@ -24860,10 +24854,10 @@
                             </m:sSubPr>
                             <m:e>
                               <m:r>
-                                <a:rPr lang="en-US" altLang="zh-TW" sz="2400" i="1">
+                                <a:rPr lang="en-US" altLang="zh-TW" sz="2400" b="0" i="1" smtClean="0">
                                   <a:latin typeface="Cambria Math" panose="02040503050406030204" pitchFamily="18" charset="0"/>
                                 </a:rPr>
-                                <m:t>𝜔</m:t>
+                                <m:t>𝑤</m:t>
                               </m:r>
                             </m:e>
                             <m:sub>
@@ -25007,10 +25001,10 @@
                             </m:sSubPr>
                             <m:e>
                               <m:r>
-                                <a:rPr lang="en-US" altLang="zh-TW" sz="2400" i="1">
+                                <a:rPr lang="en-US" altLang="zh-TW" sz="2400" b="0" i="1" smtClean="0">
                                   <a:latin typeface="Cambria Math" panose="02040503050406030204" pitchFamily="18" charset="0"/>
                                 </a:rPr>
-                                <m:t>𝜔</m:t>
+                                <m:t>𝑤</m:t>
                               </m:r>
                             </m:e>
                             <m:sub>
@@ -25038,10 +25032,10 @@
                             </m:sSubPr>
                             <m:e>
                               <m:r>
-                                <a:rPr lang="en-US" altLang="zh-TW" sz="2400" i="1">
+                                <a:rPr lang="en-US" altLang="zh-TW" sz="2400" b="0" i="1" smtClean="0">
                                   <a:latin typeface="Cambria Math" panose="02040503050406030204" pitchFamily="18" charset="0"/>
                                 </a:rPr>
-                                <m:t>𝜔</m:t>
+                                <m:t>𝑤</m:t>
                               </m:r>
                             </m:e>
                             <m:sub>
@@ -25129,10 +25123,10 @@
                             </m:sSubPr>
                             <m:e>
                               <m:r>
-                                <a:rPr lang="en-US" altLang="zh-TW" sz="2400" i="1">
+                                <a:rPr lang="en-US" altLang="zh-TW" sz="2400" b="0" i="1" smtClean="0">
                                   <a:latin typeface="Cambria Math" panose="02040503050406030204" pitchFamily="18" charset="0"/>
                                 </a:rPr>
-                                <m:t>𝜔</m:t>
+                                <m:t>𝑤</m:t>
                               </m:r>
                             </m:e>
                             <m:sub>
@@ -25160,10 +25154,10 @@
                             </m:sSubPr>
                             <m:e>
                               <m:r>
-                                <a:rPr lang="en-US" altLang="zh-TW" sz="2400" i="1">
+                                <a:rPr lang="en-US" altLang="zh-TW" sz="2400" b="0" i="1" smtClean="0">
                                   <a:latin typeface="Cambria Math" panose="02040503050406030204" pitchFamily="18" charset="0"/>
                                 </a:rPr>
-                                <m:t>𝜔</m:t>
+                                <m:t>𝑤</m:t>
                               </m:r>
                             </m:e>
                             <m:sub>
@@ -25369,7 +25363,7 @@
             </p:txBody>
           </p:sp>
         </mc:Choice>
-        <mc:Fallback xmlns="">
+        <mc:Fallback>
           <p:sp>
             <p:nvSpPr>
               <p:cNvPr id="3" name="Content Placeholder 2">
@@ -26113,8 +26107,8 @@
           <a:chExt cx="0" cy="0"/>
         </a:xfrm>
       </p:grpSpPr>
-      <mc:AlternateContent xmlns:mc="http://schemas.openxmlformats.org/markup-compatibility/2006">
-        <mc:Choice xmlns:a14="http://schemas.microsoft.com/office/drawing/2010/main" Requires="a14">
+      <mc:AlternateContent xmlns:mc="http://schemas.openxmlformats.org/markup-compatibility/2006" xmlns:a14="http://schemas.microsoft.com/office/drawing/2010/main">
+        <mc:Choice Requires="a14">
           <p:sp>
             <p:nvSpPr>
               <p:cNvPr id="3" name="Content Placeholder 2">
@@ -26304,7 +26298,7 @@
             </p:txBody>
           </p:sp>
         </mc:Choice>
-        <mc:Fallback>
+        <mc:Fallback xmlns="">
           <p:sp>
             <p:nvSpPr>
               <p:cNvPr id="3" name="Content Placeholder 2">
@@ -26979,8 +26973,8 @@
           <a:chExt cx="0" cy="0"/>
         </a:xfrm>
       </p:grpSpPr>
-      <mc:AlternateContent xmlns:mc="http://schemas.openxmlformats.org/markup-compatibility/2006" xmlns:a14="http://schemas.microsoft.com/office/drawing/2010/main">
-        <mc:Choice Requires="a14">
+      <mc:AlternateContent xmlns:mc="http://schemas.openxmlformats.org/markup-compatibility/2006">
+        <mc:Choice xmlns:a14="http://schemas.microsoft.com/office/drawing/2010/main" Requires="a14">
           <p:sp>
             <p:nvSpPr>
               <p:cNvPr id="3" name="Content Placeholder 2">
@@ -27345,10 +27339,10 @@
                           </m:sSubPr>
                           <m:e>
                             <m:r>
-                              <a:rPr lang="en-US" altLang="zh-TW" sz="2000" i="1">
+                              <a:rPr lang="en-US" altLang="zh-TW" sz="2000" b="0" i="1" smtClean="0">
                                 <a:latin typeface="Cambria Math" panose="02040503050406030204" pitchFamily="18" charset="0"/>
                               </a:rPr>
-                              <m:t>𝜔</m:t>
+                              <m:t>𝑤</m:t>
                             </m:r>
                           </m:e>
                           <m:sub>
@@ -27376,10 +27370,10 @@
                           </m:sSubPr>
                           <m:e>
                             <m:r>
-                              <a:rPr lang="en-US" altLang="zh-TW" sz="2000" i="1">
+                              <a:rPr lang="en-US" altLang="zh-TW" sz="2000" b="0" i="1" smtClean="0">
                                 <a:latin typeface="Cambria Math" panose="02040503050406030204" pitchFamily="18" charset="0"/>
                               </a:rPr>
-                              <m:t>𝜔</m:t>
+                              <m:t>𝑤</m:t>
                             </m:r>
                           </m:e>
                           <m:sub>
@@ -27475,7 +27469,7 @@
             </p:txBody>
           </p:sp>
         </mc:Choice>
-        <mc:Fallback xmlns="">
+        <mc:Fallback>
           <p:sp>
             <p:nvSpPr>
               <p:cNvPr id="3" name="Content Placeholder 2">
